--- a/Claribot Documents/Clarilux Support AI (Claribot).pptx
+++ b/Claribot Documents/Clarilux Support AI (Claribot).pptx
@@ -14517,7 +14517,7 @@
         <p:spPr>
           <a:xfrm>
             <a:off x="2750581" y="2186880"/>
-            <a:ext cx="6690836" cy="788640"/>
+            <a:ext cx="6690836" cy="955646"/>
           </a:xfrm>
           <a:prstGeom prst="rect">
             <a:avLst/>
@@ -14545,18 +14545,6 @@
               </a:spcAft>
               <a:buNone/>
             </a:pPr>
-            <a:r>
-              <a:rPr lang="en-US" sz="5400" b="1" i="0" u="none" strike="noStrike" cap="none" dirty="0">
-                <a:solidFill>
-                  <a:srgbClr val="FFFFFF"/>
-                </a:solidFill>
-                <a:latin typeface="Urbanist"/>
-                <a:ea typeface="Urbanist"/>
-                <a:cs typeface="Urbanist"/>
-                <a:sym typeface="Urbanist"/>
-              </a:rPr>
-              <a:t>TECHNICAL </a:t>
-            </a:r>
             <a:r>
               <a:rPr lang="en-US" sz="5400" b="1" i="0" u="none" strike="noStrike" cap="none" dirty="0">
                 <a:solidFill>
@@ -14611,7 +14599,7 @@
               <a:buNone/>
             </a:pPr>
             <a:r>
-              <a:rPr lang="en-US" sz="1650" b="0" i="0" u="none" strike="noStrike" cap="none">
+              <a:rPr lang="en-US" sz="1650" b="0" i="0" u="none" strike="noStrike" cap="none" dirty="0">
                 <a:solidFill>
                   <a:srgbClr val="CBD5E1"/>
                 </a:solidFill>
@@ -14622,7 +14610,7 @@
               </a:rPr>
               <a:t>Clarilux Support AI (Claribot) Operations &amp; Codebase Documentation</a:t>
             </a:r>
-            <a:endParaRPr/>
+            <a:endParaRPr dirty="0"/>
           </a:p>
         </p:txBody>
       </p:sp>
